--- a/ECC Sunday School - The Power to Scatter (Slides).pptx
+++ b/ECC Sunday School - The Power to Scatter (Slides).pptx
@@ -3449,7 +3449,7 @@
               </a:defRPr>
             </a:pPr>
             <a:r>
-              <a:t>Greek "approved" = suneudokeo — "to be pleased with"</a:t>
+              <a:t>Greek "approved" = suneodokeo — "to be pleased with"</a:t>
             </a:r>
           </a:p>
         </p:txBody>
